--- a/outputs/ON-FARM_천안_기획서.pptx
+++ b/outputs/ON-FARM_천안_기획서.pptx
@@ -10422,7 +10422,7 @@
                 </a:solidFill>
                 <a:latin typeface="맑은 고딕"/>
               </a:rPr>
-              <a:t>그중 경영주 60대 이상 약 5,699가구로 추정</a:t>
+              <a:t>그들은 평균 65.1세가 경영하는 소농이다 (60대 이상 70% · 경지 1ha 미만 77%)</a:t>
             </a:r>
           </a:p>
         </p:txBody>
@@ -10507,7 +10507,7 @@
                 </a:solidFill>
                 <a:latin typeface="맑은 고딕"/>
               </a:rPr>
-              <a:t>두 수치는 조사 주체·기준이 달라 정밀한 차집합이 아니라 규모 감각으로 제시합니다.</a:t>
+              <a:t>조사 주체·기준이 달라 정밀한 차집합이 아닙니다. 농가 수는 2024년, 연령·경지 비율은 2020년 총조사입니다.</a:t>
             </a:r>
           </a:p>
         </p:txBody>
@@ -10546,7 +10546,7 @@
                 </a:solidFill>
                 <a:latin typeface="맑은 고딕"/>
               </a:rPr>
-              <a:t>출처: KOSIS 「행정구역별 농가·농가인구」 DT_1EA1011(2024) · 천안시 로컬푸드 현황 보도(2026-05-27) · 산출: tools/cheonan_gap.py</a:t>
+              <a:t>출처: KOSIS DT_1EA1011(2024) 농가 · DT_1AG20107(2020 농림어업총조사) 연령·경지 · 로컬푸드 현황 보도(2026-05-27) · 산출 tools/cheonan_gap.py·cheonan_age.py</a:t>
             </a:r>
           </a:p>
         </p:txBody>

--- a/outputs/ON-FARM_천안_기획서.pptx
+++ b/outputs/ON-FARM_천안_기획서.pptx
@@ -19,6 +19,7 @@
     <p:sldId id="267" r:id="rId18"/>
     <p:sldId id="268" r:id="rId19"/>
     <p:sldId id="269" r:id="rId20"/>
+    <p:sldId id="270" r:id="rId21"/>
   </p:sldIdLst>
   <p:sldSz cx="12191695" cy="6858000" type="screen4x3"/>
   <p:notesSz cx="6858000" cy="9144000"/>
@@ -8238,6 +8239,1727 @@
 </file>
 
 <file path=ppt/slides/slide14.xml><?xml version="1.0" encoding="utf-8"?>
+<p:sld xmlns:a="http://schemas.openxmlformats.org/drawingml/2006/main" xmlns:p="http://schemas.openxmlformats.org/presentationml/2006/main" xmlns:r="http://schemas.openxmlformats.org/officeDocument/2006/relationships">
+  <p:cSld>
+    <p:bg>
+      <p:bgPr>
+        <a:solidFill>
+          <a:srgbClr val="FDF8F0"/>
+        </a:solidFill>
+        <a:effectLst/>
+      </p:bgPr>
+    </p:bg>
+    <p:spTree>
+      <p:nvGrpSpPr>
+        <p:cNvPr id="1" name=""/>
+        <p:cNvGrpSpPr/>
+        <p:nvPr/>
+      </p:nvGrpSpPr>
+      <p:grpSpPr/>
+      <p:sp>
+        <p:nvSpPr>
+          <p:cNvPr id="2" name="TextBox 1"/>
+          <p:cNvSpPr txBox="1"/>
+          <p:nvPr/>
+        </p:nvSpPr>
+        <p:spPr>
+          <a:xfrm>
+            <a:off x="640080" y="384048"/>
+            <a:ext cx="10881360" cy="292608"/>
+          </a:xfrm>
+          <a:prstGeom prst="rect">
+            <a:avLst/>
+          </a:prstGeom>
+          <a:noFill/>
+        </p:spPr>
+        <p:txBody>
+          <a:bodyPr wrap="square" anchor="t">
+            <a:spAutoFit/>
+          </a:bodyPr>
+          <a:lstStyle/>
+          <a:p>
+            <a:pPr algn="l">
+              <a:lnSpc>
+                <a:spcPct val="125000"/>
+              </a:lnSpc>
+            </a:pPr>
+            <a:r>
+              <a:rPr sz="1300" b="1">
+                <a:solidFill>
+                  <a:srgbClr val="DD4B14"/>
+                </a:solidFill>
+                <a:latin typeface="맑은 고딕"/>
+              </a:rPr>
+              <a:t>활용 데이터</a:t>
+            </a:r>
+          </a:p>
+        </p:txBody>
+      </p:sp>
+      <p:sp>
+        <p:nvSpPr>
+          <p:cNvPr id="3" name="TextBox 2"/>
+          <p:cNvSpPr txBox="1"/>
+          <p:nvPr/>
+        </p:nvSpPr>
+        <p:spPr>
+          <a:xfrm>
+            <a:off x="640080" y="685800"/>
+            <a:ext cx="10881360" cy="685800"/>
+          </a:xfrm>
+          <a:prstGeom prst="rect">
+            <a:avLst/>
+          </a:prstGeom>
+          <a:noFill/>
+        </p:spPr>
+        <p:txBody>
+          <a:bodyPr wrap="square" anchor="t">
+            <a:spAutoFit/>
+          </a:bodyPr>
+          <a:lstStyle/>
+          <a:p>
+            <a:pPr algn="l">
+              <a:lnSpc>
+                <a:spcPct val="125000"/>
+              </a:lnSpc>
+            </a:pPr>
+            <a:r>
+              <a:rPr sz="3100" b="1">
+                <a:solidFill>
+                  <a:srgbClr val="23201C"/>
+                </a:solidFill>
+                <a:latin typeface="맑은 고딕"/>
+              </a:rPr>
+              <a:t>쓴 데이터를 전부 밝힌다</a:t>
+            </a:r>
+          </a:p>
+        </p:txBody>
+      </p:sp>
+      <p:sp>
+        <p:nvSpPr>
+          <p:cNvPr id="4" name="Rectangle 3"/>
+          <p:cNvSpPr/>
+          <p:nvPr/>
+        </p:nvSpPr>
+        <p:spPr>
+          <a:xfrm>
+            <a:off x="640080" y="1389888"/>
+            <a:ext cx="10908792" cy="20320"/>
+          </a:xfrm>
+          <a:prstGeom prst="rect">
+            <a:avLst/>
+          </a:prstGeom>
+          <a:solidFill>
+            <a:srgbClr val="E6DDCC"/>
+          </a:solidFill>
+          <a:ln>
+            <a:noFill/>
+          </a:ln>
+          <a:effectLst/>
+        </p:spPr>
+        <p:style>
+          <a:lnRef idx="1">
+            <a:schemeClr val="accent1"/>
+          </a:lnRef>
+          <a:fillRef idx="3">
+            <a:schemeClr val="accent1"/>
+          </a:fillRef>
+          <a:effectRef idx="2">
+            <a:schemeClr val="accent1"/>
+          </a:effectRef>
+          <a:fontRef idx="minor">
+            <a:schemeClr val="lt1"/>
+          </a:fontRef>
+        </p:style>
+        <p:txBody>
+          <a:bodyPr rtlCol="0" anchor="ctr"/>
+          <a:lstStyle/>
+          <a:p>
+            <a:pPr algn="ctr"/>
+          </a:p>
+        </p:txBody>
+      </p:sp>
+      <p:sp>
+        <p:nvSpPr>
+          <p:cNvPr id="5" name="TextBox 4"/>
+          <p:cNvSpPr txBox="1"/>
+          <p:nvPr/>
+        </p:nvSpPr>
+        <p:spPr>
+          <a:xfrm>
+            <a:off x="11064240" y="6327648"/>
+            <a:ext cx="548640" cy="274320"/>
+          </a:xfrm>
+          <a:prstGeom prst="rect">
+            <a:avLst/>
+          </a:prstGeom>
+          <a:noFill/>
+        </p:spPr>
+        <p:txBody>
+          <a:bodyPr wrap="square" anchor="t">
+            <a:spAutoFit/>
+          </a:bodyPr>
+          <a:lstStyle/>
+          <a:p>
+            <a:pPr algn="r">
+              <a:lnSpc>
+                <a:spcPct val="125000"/>
+              </a:lnSpc>
+            </a:pPr>
+            <a:r>
+              <a:rPr sz="1100" b="0">
+                <a:solidFill>
+                  <a:srgbClr val="7A7266"/>
+                </a:solidFill>
+                <a:latin typeface="맑은 고딕"/>
+              </a:rPr>
+              <a:t>14</a:t>
+            </a:r>
+          </a:p>
+        </p:txBody>
+      </p:sp>
+      <p:sp>
+        <p:nvSpPr>
+          <p:cNvPr id="6" name="TextBox 5"/>
+          <p:cNvSpPr txBox="1"/>
+          <p:nvPr/>
+        </p:nvSpPr>
+        <p:spPr>
+          <a:xfrm>
+            <a:off x="640080" y="1645920"/>
+            <a:ext cx="10881360" cy="411480"/>
+          </a:xfrm>
+          <a:prstGeom prst="rect">
+            <a:avLst/>
+          </a:prstGeom>
+          <a:noFill/>
+        </p:spPr>
+        <p:txBody>
+          <a:bodyPr wrap="square" anchor="t">
+            <a:spAutoFit/>
+          </a:bodyPr>
+          <a:lstStyle/>
+          <a:p>
+            <a:pPr algn="l">
+              <a:lnSpc>
+                <a:spcPct val="125000"/>
+              </a:lnSpc>
+            </a:pPr>
+            <a:r>
+              <a:rPr sz="1500" b="0">
+                <a:solidFill>
+                  <a:srgbClr val="7A7266"/>
+                </a:solidFill>
+                <a:latin typeface="맑은 고딕"/>
+              </a:rPr>
+              <a:t>공고문이 요구하는 출처·수집 시점·범위·주요 변수를 데이터별로 적었습니다.</a:t>
+            </a:r>
+          </a:p>
+        </p:txBody>
+      </p:sp>
+      <p:sp>
+        <p:nvSpPr>
+          <p:cNvPr id="7" name="TextBox 6"/>
+          <p:cNvSpPr txBox="1"/>
+          <p:nvPr/>
+        </p:nvSpPr>
+        <p:spPr>
+          <a:xfrm>
+            <a:off x="914400" y="2212848"/>
+            <a:ext cx="2560320" cy="320040"/>
+          </a:xfrm>
+          <a:prstGeom prst="rect">
+            <a:avLst/>
+          </a:prstGeom>
+          <a:noFill/>
+        </p:spPr>
+        <p:txBody>
+          <a:bodyPr wrap="square" anchor="t">
+            <a:spAutoFit/>
+          </a:bodyPr>
+          <a:lstStyle/>
+          <a:p>
+            <a:pPr algn="l">
+              <a:lnSpc>
+                <a:spcPct val="125000"/>
+              </a:lnSpc>
+            </a:pPr>
+            <a:r>
+              <a:rPr sz="1200" b="1">
+                <a:solidFill>
+                  <a:srgbClr val="DD4B14"/>
+                </a:solidFill>
+                <a:latin typeface="맑은 고딕"/>
+              </a:rPr>
+              <a:t>데이터 · 출처</a:t>
+            </a:r>
+          </a:p>
+        </p:txBody>
+      </p:sp>
+      <p:sp>
+        <p:nvSpPr>
+          <p:cNvPr id="8" name="TextBox 7"/>
+          <p:cNvSpPr txBox="1"/>
+          <p:nvPr/>
+        </p:nvSpPr>
+        <p:spPr>
+          <a:xfrm>
+            <a:off x="3566160" y="2212848"/>
+            <a:ext cx="1737360" cy="320040"/>
+          </a:xfrm>
+          <a:prstGeom prst="rect">
+            <a:avLst/>
+          </a:prstGeom>
+          <a:noFill/>
+        </p:spPr>
+        <p:txBody>
+          <a:bodyPr wrap="square" anchor="t">
+            <a:spAutoFit/>
+          </a:bodyPr>
+          <a:lstStyle/>
+          <a:p>
+            <a:pPr algn="l">
+              <a:lnSpc>
+                <a:spcPct val="125000"/>
+              </a:lnSpc>
+            </a:pPr>
+            <a:r>
+              <a:rPr sz="1200" b="1">
+                <a:solidFill>
+                  <a:srgbClr val="DD4B14"/>
+                </a:solidFill>
+                <a:latin typeface="맑은 고딕"/>
+              </a:rPr>
+              <a:t>수집 시점</a:t>
+            </a:r>
+          </a:p>
+        </p:txBody>
+      </p:sp>
+      <p:sp>
+        <p:nvSpPr>
+          <p:cNvPr id="9" name="TextBox 8"/>
+          <p:cNvSpPr txBox="1"/>
+          <p:nvPr/>
+        </p:nvSpPr>
+        <p:spPr>
+          <a:xfrm>
+            <a:off x="5394960" y="2212848"/>
+            <a:ext cx="1645920" cy="320040"/>
+          </a:xfrm>
+          <a:prstGeom prst="rect">
+            <a:avLst/>
+          </a:prstGeom>
+          <a:noFill/>
+        </p:spPr>
+        <p:txBody>
+          <a:bodyPr wrap="square" anchor="t">
+            <a:spAutoFit/>
+          </a:bodyPr>
+          <a:lstStyle/>
+          <a:p>
+            <a:pPr algn="l">
+              <a:lnSpc>
+                <a:spcPct val="125000"/>
+              </a:lnSpc>
+            </a:pPr>
+            <a:r>
+              <a:rPr sz="1200" b="1">
+                <a:solidFill>
+                  <a:srgbClr val="DD4B14"/>
+                </a:solidFill>
+                <a:latin typeface="맑은 고딕"/>
+              </a:rPr>
+              <a:t>기준 시점</a:t>
+            </a:r>
+          </a:p>
+        </p:txBody>
+      </p:sp>
+      <p:sp>
+        <p:nvSpPr>
+          <p:cNvPr id="10" name="TextBox 9"/>
+          <p:cNvSpPr txBox="1"/>
+          <p:nvPr/>
+        </p:nvSpPr>
+        <p:spPr>
+          <a:xfrm>
+            <a:off x="7132320" y="2212848"/>
+            <a:ext cx="1920240" cy="320040"/>
+          </a:xfrm>
+          <a:prstGeom prst="rect">
+            <a:avLst/>
+          </a:prstGeom>
+          <a:noFill/>
+        </p:spPr>
+        <p:txBody>
+          <a:bodyPr wrap="square" anchor="t">
+            <a:spAutoFit/>
+          </a:bodyPr>
+          <a:lstStyle/>
+          <a:p>
+            <a:pPr algn="l">
+              <a:lnSpc>
+                <a:spcPct val="125000"/>
+              </a:lnSpc>
+            </a:pPr>
+            <a:r>
+              <a:rPr sz="1200" b="1">
+                <a:solidFill>
+                  <a:srgbClr val="DD4B14"/>
+                </a:solidFill>
+                <a:latin typeface="맑은 고딕"/>
+              </a:rPr>
+              <a:t>사용 범위</a:t>
+            </a:r>
+          </a:p>
+        </p:txBody>
+      </p:sp>
+      <p:sp>
+        <p:nvSpPr>
+          <p:cNvPr id="11" name="TextBox 10"/>
+          <p:cNvSpPr txBox="1"/>
+          <p:nvPr/>
+        </p:nvSpPr>
+        <p:spPr>
+          <a:xfrm>
+            <a:off x="9144000" y="2212848"/>
+            <a:ext cx="2377440" cy="320040"/>
+          </a:xfrm>
+          <a:prstGeom prst="rect">
+            <a:avLst/>
+          </a:prstGeom>
+          <a:noFill/>
+        </p:spPr>
+        <p:txBody>
+          <a:bodyPr wrap="square" anchor="t">
+            <a:spAutoFit/>
+          </a:bodyPr>
+          <a:lstStyle/>
+          <a:p>
+            <a:pPr algn="l">
+              <a:lnSpc>
+                <a:spcPct val="125000"/>
+              </a:lnSpc>
+            </a:pPr>
+            <a:r>
+              <a:rPr sz="1200" b="1">
+                <a:solidFill>
+                  <a:srgbClr val="DD4B14"/>
+                </a:solidFill>
+                <a:latin typeface="맑은 고딕"/>
+              </a:rPr>
+              <a:t>주요 변수</a:t>
+            </a:r>
+          </a:p>
+        </p:txBody>
+      </p:sp>
+      <p:sp>
+        <p:nvSpPr>
+          <p:cNvPr id="12" name="Rounded Rectangle 11"/>
+          <p:cNvSpPr/>
+          <p:nvPr/>
+        </p:nvSpPr>
+        <p:spPr>
+          <a:xfrm>
+            <a:off x="640080" y="2560320"/>
+            <a:ext cx="10927080" cy="749808"/>
+          </a:xfrm>
+          <a:prstGeom prst="roundRect">
+            <a:avLst>
+              <a:gd name="adj" fmla="val 6000"/>
+            </a:avLst>
+          </a:prstGeom>
+          <a:solidFill>
+            <a:srgbClr val="FDF8F0"/>
+          </a:solidFill>
+          <a:ln>
+            <a:noFill/>
+          </a:ln>
+          <a:effectLst/>
+        </p:spPr>
+        <p:style>
+          <a:lnRef idx="1">
+            <a:schemeClr val="accent1"/>
+          </a:lnRef>
+          <a:fillRef idx="3">
+            <a:schemeClr val="accent1"/>
+          </a:fillRef>
+          <a:effectRef idx="2">
+            <a:schemeClr val="accent1"/>
+          </a:effectRef>
+          <a:fontRef idx="minor">
+            <a:schemeClr val="lt1"/>
+          </a:fontRef>
+        </p:style>
+        <p:txBody>
+          <a:bodyPr rtlCol="0" anchor="ctr"/>
+          <a:lstStyle/>
+          <a:p>
+            <a:pPr algn="ctr"/>
+          </a:p>
+        </p:txBody>
+      </p:sp>
+      <p:sp>
+        <p:nvSpPr>
+          <p:cNvPr id="13" name="TextBox 12"/>
+          <p:cNvSpPr txBox="1"/>
+          <p:nvPr/>
+        </p:nvSpPr>
+        <p:spPr>
+          <a:xfrm>
+            <a:off x="914400" y="2651760"/>
+            <a:ext cx="2560320" cy="713232"/>
+          </a:xfrm>
+          <a:prstGeom prst="rect">
+            <a:avLst/>
+          </a:prstGeom>
+          <a:noFill/>
+        </p:spPr>
+        <p:txBody>
+          <a:bodyPr wrap="square" anchor="t">
+            <a:spAutoFit/>
+          </a:bodyPr>
+          <a:lstStyle/>
+          <a:p>
+            <a:pPr algn="l">
+              <a:lnSpc>
+                <a:spcPct val="120000"/>
+              </a:lnSpc>
+            </a:pPr>
+            <a:r>
+              <a:rPr sz="1150" b="1">
+                <a:solidFill>
+                  <a:srgbClr val="23201C"/>
+                </a:solidFill>
+                <a:latin typeface="맑은 고딕"/>
+              </a:rPr>
+              <a:t>AI Hub 농산물 품질(QC) 이미지</a:t>
+            </a:r>
+          </a:p>
+          <a:p>
+            <a:pPr algn="l">
+              <a:lnSpc>
+                <a:spcPct val="120000"/>
+              </a:lnSpc>
+            </a:pPr>
+            <a:r>
+              <a:rPr sz="1050" b="0">
+                <a:solidFill>
+                  <a:srgbClr val="7A7266"/>
+                </a:solidFill>
+                <a:latin typeface="맑은 고딕"/>
+              </a:rPr>
+              <a:t>데이터셋 149 · 승인 후 수령</a:t>
+            </a:r>
+          </a:p>
+        </p:txBody>
+      </p:sp>
+      <p:sp>
+        <p:nvSpPr>
+          <p:cNvPr id="14" name="TextBox 13"/>
+          <p:cNvSpPr txBox="1"/>
+          <p:nvPr/>
+        </p:nvSpPr>
+        <p:spPr>
+          <a:xfrm>
+            <a:off x="3566160" y="2651760"/>
+            <a:ext cx="1737360" cy="713232"/>
+          </a:xfrm>
+          <a:prstGeom prst="rect">
+            <a:avLst/>
+          </a:prstGeom>
+          <a:noFill/>
+        </p:spPr>
+        <p:txBody>
+          <a:bodyPr wrap="square" anchor="t">
+            <a:spAutoFit/>
+          </a:bodyPr>
+          <a:lstStyle/>
+          <a:p>
+            <a:pPr algn="l">
+              <a:lnSpc>
+                <a:spcPct val="120000"/>
+              </a:lnSpc>
+            </a:pPr>
+            <a:r>
+              <a:rPr sz="1150" b="1">
+                <a:solidFill>
+                  <a:srgbClr val="23201C"/>
+                </a:solidFill>
+                <a:latin typeface="맑은 고딕"/>
+              </a:rPr>
+              <a:t>2026-08-09</a:t>
+            </a:r>
+          </a:p>
+        </p:txBody>
+      </p:sp>
+      <p:sp>
+        <p:nvSpPr>
+          <p:cNvPr id="15" name="TextBox 14"/>
+          <p:cNvSpPr txBox="1"/>
+          <p:nvPr/>
+        </p:nvSpPr>
+        <p:spPr>
+          <a:xfrm>
+            <a:off x="5394960" y="2651760"/>
+            <a:ext cx="1645920" cy="713232"/>
+          </a:xfrm>
+          <a:prstGeom prst="rect">
+            <a:avLst/>
+          </a:prstGeom>
+          <a:noFill/>
+        </p:spPr>
+        <p:txBody>
+          <a:bodyPr wrap="square" anchor="t">
+            <a:spAutoFit/>
+          </a:bodyPr>
+          <a:lstStyle/>
+          <a:p>
+            <a:pPr algn="l">
+              <a:lnSpc>
+                <a:spcPct val="120000"/>
+              </a:lnSpc>
+            </a:pPr>
+            <a:r>
+              <a:rPr sz="1150" b="1">
+                <a:solidFill>
+                  <a:srgbClr val="23201C"/>
+                </a:solidFill>
+                <a:latin typeface="맑은 고딕"/>
+              </a:rPr>
+              <a:t>2020 구축</a:t>
+            </a:r>
+          </a:p>
+          <a:p>
+            <a:pPr algn="l">
+              <a:lnSpc>
+                <a:spcPct val="120000"/>
+              </a:lnSpc>
+            </a:pPr>
+            <a:r>
+              <a:rPr sz="1050" b="0">
+                <a:solidFill>
+                  <a:srgbClr val="7A7266"/>
+                </a:solidFill>
+                <a:latin typeface="맑은 고딕"/>
+              </a:rPr>
+              <a:t>2023-09 갱신</a:t>
+            </a:r>
+          </a:p>
+        </p:txBody>
+      </p:sp>
+      <p:sp>
+        <p:nvSpPr>
+          <p:cNvPr id="16" name="TextBox 15"/>
+          <p:cNvSpPr txBox="1"/>
+          <p:nvPr/>
+        </p:nvSpPr>
+        <p:spPr>
+          <a:xfrm>
+            <a:off x="7132320" y="2651760"/>
+            <a:ext cx="1920240" cy="713232"/>
+          </a:xfrm>
+          <a:prstGeom prst="rect">
+            <a:avLst/>
+          </a:prstGeom>
+          <a:noFill/>
+        </p:spPr>
+        <p:txBody>
+          <a:bodyPr wrap="square" anchor="t">
+            <a:spAutoFit/>
+          </a:bodyPr>
+          <a:lstStyle/>
+          <a:p>
+            <a:pPr algn="l">
+              <a:lnSpc>
+                <a:spcPct val="120000"/>
+              </a:lnSpc>
+            </a:pPr>
+            <a:r>
+              <a:rPr sz="1150" b="1">
+                <a:solidFill>
+                  <a:srgbClr val="23201C"/>
+                </a:solidFill>
+                <a:latin typeface="맑은 고딕"/>
+              </a:rPr>
+              <a:t>5개 품목</a:t>
+            </a:r>
+          </a:p>
+          <a:p>
+            <a:pPr algn="l">
+              <a:lnSpc>
+                <a:spcPct val="120000"/>
+              </a:lnSpc>
+            </a:pPr>
+            <a:r>
+              <a:rPr sz="1050" b="0">
+                <a:solidFill>
+                  <a:srgbClr val="7A7266"/>
+                </a:solidFill>
+                <a:latin typeface="맑은 고딕"/>
+              </a:rPr>
+              <a:t>122,425장</a:t>
+            </a:r>
+          </a:p>
+        </p:txBody>
+      </p:sp>
+      <p:sp>
+        <p:nvSpPr>
+          <p:cNvPr id="17" name="TextBox 16"/>
+          <p:cNvSpPr txBox="1"/>
+          <p:nvPr/>
+        </p:nvSpPr>
+        <p:spPr>
+          <a:xfrm>
+            <a:off x="9144000" y="2651760"/>
+            <a:ext cx="2377440" cy="713232"/>
+          </a:xfrm>
+          <a:prstGeom prst="rect">
+            <a:avLst/>
+          </a:prstGeom>
+          <a:noFill/>
+        </p:spPr>
+        <p:txBody>
+          <a:bodyPr wrap="square" anchor="t">
+            <a:spAutoFit/>
+          </a:bodyPr>
+          <a:lstStyle/>
+          <a:p>
+            <a:pPr algn="l">
+              <a:lnSpc>
+                <a:spcPct val="120000"/>
+              </a:lnSpc>
+            </a:pPr>
+            <a:r>
+              <a:rPr sz="1150" b="1">
+                <a:solidFill>
+                  <a:srgbClr val="23201C"/>
+                </a:solidFill>
+                <a:latin typeface="맑은 고딕"/>
+              </a:rPr>
+              <a:t>품목·품종·등급·중량</a:t>
+            </a:r>
+          </a:p>
+          <a:p>
+            <a:pPr algn="l">
+              <a:lnSpc>
+                <a:spcPct val="120000"/>
+              </a:lnSpc>
+            </a:pPr>
+            <a:r>
+              <a:rPr sz="1050" b="0">
+                <a:solidFill>
+                  <a:srgbClr val="7A7266"/>
+                </a:solidFill>
+                <a:latin typeface="맑은 고딕"/>
+              </a:rPr>
+              <a:t>group_no(개체)</a:t>
+            </a:r>
+          </a:p>
+        </p:txBody>
+      </p:sp>
+      <p:sp>
+        <p:nvSpPr>
+          <p:cNvPr id="18" name="Rounded Rectangle 17"/>
+          <p:cNvSpPr/>
+          <p:nvPr/>
+        </p:nvSpPr>
+        <p:spPr>
+          <a:xfrm>
+            <a:off x="640080" y="3383280"/>
+            <a:ext cx="10927080" cy="749808"/>
+          </a:xfrm>
+          <a:prstGeom prst="roundRect">
+            <a:avLst>
+              <a:gd name="adj" fmla="val 6000"/>
+            </a:avLst>
+          </a:prstGeom>
+          <a:solidFill>
+            <a:srgbClr val="F7F2E9"/>
+          </a:solidFill>
+          <a:ln>
+            <a:noFill/>
+          </a:ln>
+          <a:effectLst/>
+        </p:spPr>
+        <p:style>
+          <a:lnRef idx="1">
+            <a:schemeClr val="accent1"/>
+          </a:lnRef>
+          <a:fillRef idx="3">
+            <a:schemeClr val="accent1"/>
+          </a:fillRef>
+          <a:effectRef idx="2">
+            <a:schemeClr val="accent1"/>
+          </a:effectRef>
+          <a:fontRef idx="minor">
+            <a:schemeClr val="lt1"/>
+          </a:fontRef>
+        </p:style>
+        <p:txBody>
+          <a:bodyPr rtlCol="0" anchor="ctr"/>
+          <a:lstStyle/>
+          <a:p>
+            <a:pPr algn="ctr"/>
+          </a:p>
+        </p:txBody>
+      </p:sp>
+      <p:sp>
+        <p:nvSpPr>
+          <p:cNvPr id="19" name="TextBox 18"/>
+          <p:cNvSpPr txBox="1"/>
+          <p:nvPr/>
+        </p:nvSpPr>
+        <p:spPr>
+          <a:xfrm>
+            <a:off x="914400" y="3474720"/>
+            <a:ext cx="2560320" cy="713232"/>
+          </a:xfrm>
+          <a:prstGeom prst="rect">
+            <a:avLst/>
+          </a:prstGeom>
+          <a:noFill/>
+        </p:spPr>
+        <p:txBody>
+          <a:bodyPr wrap="square" anchor="t">
+            <a:spAutoFit/>
+          </a:bodyPr>
+          <a:lstStyle/>
+          <a:p>
+            <a:pPr algn="l">
+              <a:lnSpc>
+                <a:spcPct val="120000"/>
+              </a:lnSpc>
+            </a:pPr>
+            <a:r>
+              <a:rPr sz="1150" b="1">
+                <a:solidFill>
+                  <a:srgbClr val="23201C"/>
+                </a:solidFill>
+                <a:latin typeface="맑은 고딕"/>
+              </a:rPr>
+              <a:t>KOSIS DT_1EA1011</a:t>
+            </a:r>
+          </a:p>
+          <a:p>
+            <a:pPr algn="l">
+              <a:lnSpc>
+                <a:spcPct val="120000"/>
+              </a:lnSpc>
+            </a:pPr>
+            <a:r>
+              <a:rPr sz="1050" b="0">
+                <a:solidFill>
+                  <a:srgbClr val="7A7266"/>
+                </a:solidFill>
+                <a:latin typeface="맑은 고딕"/>
+              </a:rPr>
+              <a:t>농림어업조사 · 표본</a:t>
+            </a:r>
+          </a:p>
+        </p:txBody>
+      </p:sp>
+      <p:sp>
+        <p:nvSpPr>
+          <p:cNvPr id="20" name="TextBox 19"/>
+          <p:cNvSpPr txBox="1"/>
+          <p:nvPr/>
+        </p:nvSpPr>
+        <p:spPr>
+          <a:xfrm>
+            <a:off x="3566160" y="3474720"/>
+            <a:ext cx="1737360" cy="713232"/>
+          </a:xfrm>
+          <a:prstGeom prst="rect">
+            <a:avLst/>
+          </a:prstGeom>
+          <a:noFill/>
+        </p:spPr>
+        <p:txBody>
+          <a:bodyPr wrap="square" anchor="t">
+            <a:spAutoFit/>
+          </a:bodyPr>
+          <a:lstStyle/>
+          <a:p>
+            <a:pPr algn="l">
+              <a:lnSpc>
+                <a:spcPct val="120000"/>
+              </a:lnSpc>
+            </a:pPr>
+            <a:r>
+              <a:rPr sz="1150" b="1">
+                <a:solidFill>
+                  <a:srgbClr val="23201C"/>
+                </a:solidFill>
+                <a:latin typeface="맑은 고딕"/>
+              </a:rPr>
+              <a:t>2026-08-12</a:t>
+            </a:r>
+          </a:p>
+          <a:p>
+            <a:pPr algn="l">
+              <a:lnSpc>
+                <a:spcPct val="120000"/>
+              </a:lnSpc>
+            </a:pPr>
+            <a:r>
+              <a:rPr sz="1050" b="0">
+                <a:solidFill>
+                  <a:srgbClr val="7A7266"/>
+                </a:solidFill>
+                <a:latin typeface="맑은 고딕"/>
+              </a:rPr>
+              <a:t>CSV</a:t>
+            </a:r>
+          </a:p>
+        </p:txBody>
+      </p:sp>
+      <p:sp>
+        <p:nvSpPr>
+          <p:cNvPr id="21" name="TextBox 20"/>
+          <p:cNvSpPr txBox="1"/>
+          <p:nvPr/>
+        </p:nvSpPr>
+        <p:spPr>
+          <a:xfrm>
+            <a:off x="5394960" y="3474720"/>
+            <a:ext cx="1645920" cy="713232"/>
+          </a:xfrm>
+          <a:prstGeom prst="rect">
+            <a:avLst/>
+          </a:prstGeom>
+          <a:noFill/>
+        </p:spPr>
+        <p:txBody>
+          <a:bodyPr wrap="square" anchor="t">
+            <a:spAutoFit/>
+          </a:bodyPr>
+          <a:lstStyle/>
+          <a:p>
+            <a:pPr algn="l">
+              <a:lnSpc>
+                <a:spcPct val="120000"/>
+              </a:lnSpc>
+            </a:pPr>
+            <a:r>
+              <a:rPr sz="1150" b="1">
+                <a:solidFill>
+                  <a:srgbClr val="23201C"/>
+                </a:solidFill>
+                <a:latin typeface="맑은 고딕"/>
+              </a:rPr>
+              <a:t>2024</a:t>
+            </a:r>
+          </a:p>
+        </p:txBody>
+      </p:sp>
+      <p:sp>
+        <p:nvSpPr>
+          <p:cNvPr id="22" name="TextBox 21"/>
+          <p:cNvSpPr txBox="1"/>
+          <p:nvPr/>
+        </p:nvSpPr>
+        <p:spPr>
+          <a:xfrm>
+            <a:off x="7132320" y="3474720"/>
+            <a:ext cx="1920240" cy="713232"/>
+          </a:xfrm>
+          <a:prstGeom prst="rect">
+            <a:avLst/>
+          </a:prstGeom>
+          <a:noFill/>
+        </p:spPr>
+        <p:txBody>
+          <a:bodyPr wrap="square" anchor="t">
+            <a:spAutoFit/>
+          </a:bodyPr>
+          <a:lstStyle/>
+          <a:p>
+            <a:pPr algn="l">
+              <a:lnSpc>
+                <a:spcPct val="120000"/>
+              </a:lnSpc>
+            </a:pPr>
+            <a:r>
+              <a:rPr sz="1150" b="1">
+                <a:solidFill>
+                  <a:srgbClr val="23201C"/>
+                </a:solidFill>
+                <a:latin typeface="맑은 고딕"/>
+              </a:rPr>
+              <a:t>충남 천안시</a:t>
+            </a:r>
+          </a:p>
+        </p:txBody>
+      </p:sp>
+      <p:sp>
+        <p:nvSpPr>
+          <p:cNvPr id="23" name="TextBox 22"/>
+          <p:cNvSpPr txBox="1"/>
+          <p:nvPr/>
+        </p:nvSpPr>
+        <p:spPr>
+          <a:xfrm>
+            <a:off x="9144000" y="3474720"/>
+            <a:ext cx="2377440" cy="713232"/>
+          </a:xfrm>
+          <a:prstGeom prst="rect">
+            <a:avLst/>
+          </a:prstGeom>
+          <a:noFill/>
+        </p:spPr>
+        <p:txBody>
+          <a:bodyPr wrap="square" anchor="t">
+            <a:spAutoFit/>
+          </a:bodyPr>
+          <a:lstStyle/>
+          <a:p>
+            <a:pPr algn="l">
+              <a:lnSpc>
+                <a:spcPct val="120000"/>
+              </a:lnSpc>
+            </a:pPr>
+            <a:r>
+              <a:rPr sz="1150" b="1">
+                <a:solidFill>
+                  <a:srgbClr val="23201C"/>
+                </a:solidFill>
+                <a:latin typeface="맑은 고딕"/>
+              </a:rPr>
+              <a:t>농가(가구)</a:t>
+            </a:r>
+          </a:p>
+          <a:p>
+            <a:pPr algn="l">
+              <a:lnSpc>
+                <a:spcPct val="120000"/>
+              </a:lnSpc>
+            </a:pPr>
+            <a:r>
+              <a:rPr sz="1050" b="0">
+                <a:solidFill>
+                  <a:srgbClr val="7A7266"/>
+                </a:solidFill>
+                <a:latin typeface="맑은 고딕"/>
+              </a:rPr>
+              <a:t>상대표준오차</a:t>
+            </a:r>
+          </a:p>
+        </p:txBody>
+      </p:sp>
+      <p:sp>
+        <p:nvSpPr>
+          <p:cNvPr id="24" name="Rounded Rectangle 23"/>
+          <p:cNvSpPr/>
+          <p:nvPr/>
+        </p:nvSpPr>
+        <p:spPr>
+          <a:xfrm>
+            <a:off x="640080" y="4206240"/>
+            <a:ext cx="10927080" cy="749808"/>
+          </a:xfrm>
+          <a:prstGeom prst="roundRect">
+            <a:avLst>
+              <a:gd name="adj" fmla="val 6000"/>
+            </a:avLst>
+          </a:prstGeom>
+          <a:solidFill>
+            <a:srgbClr val="FDF8F0"/>
+          </a:solidFill>
+          <a:ln>
+            <a:noFill/>
+          </a:ln>
+          <a:effectLst/>
+        </p:spPr>
+        <p:style>
+          <a:lnRef idx="1">
+            <a:schemeClr val="accent1"/>
+          </a:lnRef>
+          <a:fillRef idx="3">
+            <a:schemeClr val="accent1"/>
+          </a:fillRef>
+          <a:effectRef idx="2">
+            <a:schemeClr val="accent1"/>
+          </a:effectRef>
+          <a:fontRef idx="minor">
+            <a:schemeClr val="lt1"/>
+          </a:fontRef>
+        </p:style>
+        <p:txBody>
+          <a:bodyPr rtlCol="0" anchor="ctr"/>
+          <a:lstStyle/>
+          <a:p>
+            <a:pPr algn="ctr"/>
+          </a:p>
+        </p:txBody>
+      </p:sp>
+      <p:sp>
+        <p:nvSpPr>
+          <p:cNvPr id="25" name="TextBox 24"/>
+          <p:cNvSpPr txBox="1"/>
+          <p:nvPr/>
+        </p:nvSpPr>
+        <p:spPr>
+          <a:xfrm>
+            <a:off x="914400" y="4297680"/>
+            <a:ext cx="2560320" cy="713232"/>
+          </a:xfrm>
+          <a:prstGeom prst="rect">
+            <a:avLst/>
+          </a:prstGeom>
+          <a:noFill/>
+        </p:spPr>
+        <p:txBody>
+          <a:bodyPr wrap="square" anchor="t">
+            <a:spAutoFit/>
+          </a:bodyPr>
+          <a:lstStyle/>
+          <a:p>
+            <a:pPr algn="l">
+              <a:lnSpc>
+                <a:spcPct val="120000"/>
+              </a:lnSpc>
+            </a:pPr>
+            <a:r>
+              <a:rPr sz="1150" b="1">
+                <a:solidFill>
+                  <a:srgbClr val="23201C"/>
+                </a:solidFill>
+                <a:latin typeface="맑은 고딕"/>
+              </a:rPr>
+              <a:t>KOSIS DT_1AG20107</a:t>
+            </a:r>
+          </a:p>
+          <a:p>
+            <a:pPr algn="l">
+              <a:lnSpc>
+                <a:spcPct val="120000"/>
+              </a:lnSpc>
+            </a:pPr>
+            <a:r>
+              <a:rPr sz="1050" b="0">
+                <a:solidFill>
+                  <a:srgbClr val="7A7266"/>
+                </a:solidFill>
+                <a:latin typeface="맑은 고딕"/>
+              </a:rPr>
+              <a:t>농림어업총조사 · 전수</a:t>
+            </a:r>
+          </a:p>
+        </p:txBody>
+      </p:sp>
+      <p:sp>
+        <p:nvSpPr>
+          <p:cNvPr id="26" name="TextBox 25"/>
+          <p:cNvSpPr txBox="1"/>
+          <p:nvPr/>
+        </p:nvSpPr>
+        <p:spPr>
+          <a:xfrm>
+            <a:off x="3566160" y="4297680"/>
+            <a:ext cx="1737360" cy="713232"/>
+          </a:xfrm>
+          <a:prstGeom prst="rect">
+            <a:avLst/>
+          </a:prstGeom>
+          <a:noFill/>
+        </p:spPr>
+        <p:txBody>
+          <a:bodyPr wrap="square" anchor="t">
+            <a:spAutoFit/>
+          </a:bodyPr>
+          <a:lstStyle/>
+          <a:p>
+            <a:pPr algn="l">
+              <a:lnSpc>
+                <a:spcPct val="120000"/>
+              </a:lnSpc>
+            </a:pPr>
+            <a:r>
+              <a:rPr sz="1150" b="1">
+                <a:solidFill>
+                  <a:srgbClr val="23201C"/>
+                </a:solidFill>
+                <a:latin typeface="맑은 고딕"/>
+              </a:rPr>
+              <a:t>2026-08-12</a:t>
+            </a:r>
+          </a:p>
+          <a:p>
+            <a:pPr algn="l">
+              <a:lnSpc>
+                <a:spcPct val="120000"/>
+              </a:lnSpc>
+            </a:pPr>
+            <a:r>
+              <a:rPr sz="1050" b="0">
+                <a:solidFill>
+                  <a:srgbClr val="7A7266"/>
+                </a:solidFill>
+                <a:latin typeface="맑은 고딕"/>
+              </a:rPr>
+              <a:t>OpenAPI</a:t>
+            </a:r>
+          </a:p>
+        </p:txBody>
+      </p:sp>
+      <p:sp>
+        <p:nvSpPr>
+          <p:cNvPr id="27" name="TextBox 26"/>
+          <p:cNvSpPr txBox="1"/>
+          <p:nvPr/>
+        </p:nvSpPr>
+        <p:spPr>
+          <a:xfrm>
+            <a:off x="5394960" y="4297680"/>
+            <a:ext cx="1645920" cy="713232"/>
+          </a:xfrm>
+          <a:prstGeom prst="rect">
+            <a:avLst/>
+          </a:prstGeom>
+          <a:noFill/>
+        </p:spPr>
+        <p:txBody>
+          <a:bodyPr wrap="square" anchor="t">
+            <a:spAutoFit/>
+          </a:bodyPr>
+          <a:lstStyle/>
+          <a:p>
+            <a:pPr algn="l">
+              <a:lnSpc>
+                <a:spcPct val="120000"/>
+              </a:lnSpc>
+            </a:pPr>
+            <a:r>
+              <a:rPr sz="1150" b="1">
+                <a:solidFill>
+                  <a:srgbClr val="23201C"/>
+                </a:solidFill>
+                <a:latin typeface="맑은 고딕"/>
+              </a:rPr>
+              <a:t>2020</a:t>
+            </a:r>
+          </a:p>
+        </p:txBody>
+      </p:sp>
+      <p:sp>
+        <p:nvSpPr>
+          <p:cNvPr id="28" name="TextBox 27"/>
+          <p:cNvSpPr txBox="1"/>
+          <p:nvPr/>
+        </p:nvSpPr>
+        <p:spPr>
+          <a:xfrm>
+            <a:off x="7132320" y="4297680"/>
+            <a:ext cx="1920240" cy="713232"/>
+          </a:xfrm>
+          <a:prstGeom prst="rect">
+            <a:avLst/>
+          </a:prstGeom>
+          <a:noFill/>
+        </p:spPr>
+        <p:txBody>
+          <a:bodyPr wrap="square" anchor="t">
+            <a:spAutoFit/>
+          </a:bodyPr>
+          <a:lstStyle/>
+          <a:p>
+            <a:pPr algn="l">
+              <a:lnSpc>
+                <a:spcPct val="120000"/>
+              </a:lnSpc>
+            </a:pPr>
+            <a:r>
+              <a:rPr sz="1150" b="1">
+                <a:solidFill>
+                  <a:srgbClr val="23201C"/>
+                </a:solidFill>
+                <a:latin typeface="맑은 고딕"/>
+              </a:rPr>
+              <a:t>천안시 34010</a:t>
+            </a:r>
+          </a:p>
+          <a:p>
+            <a:pPr algn="l">
+              <a:lnSpc>
+                <a:spcPct val="120000"/>
+              </a:lnSpc>
+            </a:pPr>
+            <a:r>
+              <a:rPr sz="1050" b="0">
+                <a:solidFill>
+                  <a:srgbClr val="7A7266"/>
+                </a:solidFill>
+                <a:latin typeface="맑은 고딕"/>
+              </a:rPr>
+              <a:t>전국 00 대조</a:t>
+            </a:r>
+          </a:p>
+        </p:txBody>
+      </p:sp>
+      <p:sp>
+        <p:nvSpPr>
+          <p:cNvPr id="29" name="TextBox 28"/>
+          <p:cNvSpPr txBox="1"/>
+          <p:nvPr/>
+        </p:nvSpPr>
+        <p:spPr>
+          <a:xfrm>
+            <a:off x="9144000" y="4297680"/>
+            <a:ext cx="2377440" cy="713232"/>
+          </a:xfrm>
+          <a:prstGeom prst="rect">
+            <a:avLst/>
+          </a:prstGeom>
+          <a:noFill/>
+        </p:spPr>
+        <p:txBody>
+          <a:bodyPr wrap="square" anchor="t">
+            <a:spAutoFit/>
+          </a:bodyPr>
+          <a:lstStyle/>
+          <a:p>
+            <a:pPr algn="l">
+              <a:lnSpc>
+                <a:spcPct val="120000"/>
+              </a:lnSpc>
+            </a:pPr>
+            <a:r>
+              <a:rPr sz="1150" b="1">
+                <a:solidFill>
+                  <a:srgbClr val="23201C"/>
+                </a:solidFill>
+                <a:latin typeface="맑은 고딕"/>
+              </a:rPr>
+              <a:t>연령대별 농가·평균연령</a:t>
+            </a:r>
+          </a:p>
+          <a:p>
+            <a:pPr algn="l">
+              <a:lnSpc>
+                <a:spcPct val="120000"/>
+              </a:lnSpc>
+            </a:pPr>
+            <a:r>
+              <a:rPr sz="1050" b="0">
+                <a:solidFill>
+                  <a:srgbClr val="7A7266"/>
+                </a:solidFill>
+                <a:latin typeface="맑은 고딕"/>
+              </a:rPr>
+              <a:t>경지규모별 농가</a:t>
+            </a:r>
+          </a:p>
+        </p:txBody>
+      </p:sp>
+      <p:sp>
+        <p:nvSpPr>
+          <p:cNvPr id="30" name="Rounded Rectangle 29"/>
+          <p:cNvSpPr/>
+          <p:nvPr/>
+        </p:nvSpPr>
+        <p:spPr>
+          <a:xfrm>
+            <a:off x="640080" y="5029200"/>
+            <a:ext cx="10927080" cy="749808"/>
+          </a:xfrm>
+          <a:prstGeom prst="roundRect">
+            <a:avLst>
+              <a:gd name="adj" fmla="val 6000"/>
+            </a:avLst>
+          </a:prstGeom>
+          <a:solidFill>
+            <a:srgbClr val="F7F2E9"/>
+          </a:solidFill>
+          <a:ln>
+            <a:noFill/>
+          </a:ln>
+          <a:effectLst/>
+        </p:spPr>
+        <p:style>
+          <a:lnRef idx="1">
+            <a:schemeClr val="accent1"/>
+          </a:lnRef>
+          <a:fillRef idx="3">
+            <a:schemeClr val="accent1"/>
+          </a:fillRef>
+          <a:effectRef idx="2">
+            <a:schemeClr val="accent1"/>
+          </a:effectRef>
+          <a:fontRef idx="minor">
+            <a:schemeClr val="lt1"/>
+          </a:fontRef>
+        </p:style>
+        <p:txBody>
+          <a:bodyPr rtlCol="0" anchor="ctr"/>
+          <a:lstStyle/>
+          <a:p>
+            <a:pPr algn="ctr"/>
+          </a:p>
+        </p:txBody>
+      </p:sp>
+      <p:sp>
+        <p:nvSpPr>
+          <p:cNvPr id="31" name="TextBox 30"/>
+          <p:cNvSpPr txBox="1"/>
+          <p:nvPr/>
+        </p:nvSpPr>
+        <p:spPr>
+          <a:xfrm>
+            <a:off x="914400" y="5120640"/>
+            <a:ext cx="2560320" cy="713232"/>
+          </a:xfrm>
+          <a:prstGeom prst="rect">
+            <a:avLst/>
+          </a:prstGeom>
+          <a:noFill/>
+        </p:spPr>
+        <p:txBody>
+          <a:bodyPr wrap="square" anchor="t">
+            <a:spAutoFit/>
+          </a:bodyPr>
+          <a:lstStyle/>
+          <a:p>
+            <a:pPr algn="l">
+              <a:lnSpc>
+                <a:spcPct val="120000"/>
+              </a:lnSpc>
+            </a:pPr>
+            <a:r>
+              <a:rPr sz="1150" b="1">
+                <a:solidFill>
+                  <a:srgbClr val="23201C"/>
+                </a:solidFill>
+                <a:latin typeface="맑은 고딕"/>
+              </a:rPr>
+              <a:t>공공데이터포털 15154733</a:t>
+            </a:r>
+          </a:p>
+          <a:p>
+            <a:pPr algn="l">
+              <a:lnSpc>
+                <a:spcPct val="120000"/>
+              </a:lnSpc>
+            </a:pPr>
+            <a:r>
+              <a:rPr sz="1050" b="0">
+                <a:solidFill>
+                  <a:srgbClr val="7A7266"/>
+                </a:solidFill>
+                <a:latin typeface="맑은 고딕"/>
+              </a:rPr>
+              <a:t>천안시 공모전 정보</a:t>
+            </a:r>
+          </a:p>
+        </p:txBody>
+      </p:sp>
+      <p:sp>
+        <p:nvSpPr>
+          <p:cNvPr id="32" name="TextBox 31"/>
+          <p:cNvSpPr txBox="1"/>
+          <p:nvPr/>
+        </p:nvSpPr>
+        <p:spPr>
+          <a:xfrm>
+            <a:off x="3566160" y="5120640"/>
+            <a:ext cx="1737360" cy="713232"/>
+          </a:xfrm>
+          <a:prstGeom prst="rect">
+            <a:avLst/>
+          </a:prstGeom>
+          <a:noFill/>
+        </p:spPr>
+        <p:txBody>
+          <a:bodyPr wrap="square" anchor="t">
+            <a:spAutoFit/>
+          </a:bodyPr>
+          <a:lstStyle/>
+          <a:p>
+            <a:pPr algn="l">
+              <a:lnSpc>
+                <a:spcPct val="120000"/>
+              </a:lnSpc>
+            </a:pPr>
+            <a:r>
+              <a:rPr sz="1150" b="1">
+                <a:solidFill>
+                  <a:srgbClr val="23201C"/>
+                </a:solidFill>
+                <a:latin typeface="맑은 고딕"/>
+              </a:rPr>
+              <a:t>2026-08-11</a:t>
+            </a:r>
+          </a:p>
+          <a:p>
+            <a:pPr algn="l">
+              <a:lnSpc>
+                <a:spcPct val="120000"/>
+              </a:lnSpc>
+            </a:pPr>
+            <a:r>
+              <a:rPr sz="1050" b="0">
+                <a:solidFill>
+                  <a:srgbClr val="7A7266"/>
+                </a:solidFill>
+                <a:latin typeface="맑은 고딕"/>
+              </a:rPr>
+              <a:t>CSV</a:t>
+            </a:r>
+          </a:p>
+        </p:txBody>
+      </p:sp>
+      <p:sp>
+        <p:nvSpPr>
+          <p:cNvPr id="33" name="TextBox 32"/>
+          <p:cNvSpPr txBox="1"/>
+          <p:nvPr/>
+        </p:nvSpPr>
+        <p:spPr>
+          <a:xfrm>
+            <a:off x="5394960" y="5120640"/>
+            <a:ext cx="1645920" cy="713232"/>
+          </a:xfrm>
+          <a:prstGeom prst="rect">
+            <a:avLst/>
+          </a:prstGeom>
+          <a:noFill/>
+        </p:spPr>
+        <p:txBody>
+          <a:bodyPr wrap="square" anchor="t">
+            <a:spAutoFit/>
+          </a:bodyPr>
+          <a:lstStyle/>
+          <a:p>
+            <a:pPr algn="l">
+              <a:lnSpc>
+                <a:spcPct val="120000"/>
+              </a:lnSpc>
+            </a:pPr>
+            <a:r>
+              <a:rPr sz="1150" b="1">
+                <a:solidFill>
+                  <a:srgbClr val="23201C"/>
+                </a:solidFill>
+                <a:latin typeface="맑은 고딕"/>
+              </a:rPr>
+              <a:t>~2024</a:t>
+            </a:r>
+          </a:p>
+        </p:txBody>
+      </p:sp>
+      <p:sp>
+        <p:nvSpPr>
+          <p:cNvPr id="34" name="TextBox 33"/>
+          <p:cNvSpPr txBox="1"/>
+          <p:nvPr/>
+        </p:nvSpPr>
+        <p:spPr>
+          <a:xfrm>
+            <a:off x="7132320" y="5120640"/>
+            <a:ext cx="1920240" cy="713232"/>
+          </a:xfrm>
+          <a:prstGeom prst="rect">
+            <a:avLst/>
+          </a:prstGeom>
+          <a:noFill/>
+        </p:spPr>
+        <p:txBody>
+          <a:bodyPr wrap="square" anchor="t">
+            <a:spAutoFit/>
+          </a:bodyPr>
+          <a:lstStyle/>
+          <a:p>
+            <a:pPr algn="l">
+              <a:lnSpc>
+                <a:spcPct val="120000"/>
+              </a:lnSpc>
+            </a:pPr>
+            <a:r>
+              <a:rPr sz="1150" b="1">
+                <a:solidFill>
+                  <a:srgbClr val="23201C"/>
+                </a:solidFill>
+                <a:latin typeface="맑은 고딕"/>
+              </a:rPr>
+              <a:t>26개 대회</a:t>
+            </a:r>
+          </a:p>
+          <a:p>
+            <a:pPr algn="l">
+              <a:lnSpc>
+                <a:spcPct val="120000"/>
+              </a:lnSpc>
+            </a:pPr>
+            <a:r>
+              <a:rPr sz="1050" b="0">
+                <a:solidFill>
+                  <a:srgbClr val="7A7266"/>
+                </a:solidFill>
+                <a:latin typeface="맑은 고딕"/>
+              </a:rPr>
+              <a:t>수상 173건</a:t>
+            </a:r>
+          </a:p>
+        </p:txBody>
+      </p:sp>
+      <p:sp>
+        <p:nvSpPr>
+          <p:cNvPr id="35" name="TextBox 34"/>
+          <p:cNvSpPr txBox="1"/>
+          <p:nvPr/>
+        </p:nvSpPr>
+        <p:spPr>
+          <a:xfrm>
+            <a:off x="9144000" y="5120640"/>
+            <a:ext cx="2377440" cy="713232"/>
+          </a:xfrm>
+          <a:prstGeom prst="rect">
+            <a:avLst/>
+          </a:prstGeom>
+          <a:noFill/>
+        </p:spPr>
+        <p:txBody>
+          <a:bodyPr wrap="square" anchor="t">
+            <a:spAutoFit/>
+          </a:bodyPr>
+          <a:lstStyle/>
+          <a:p>
+            <a:pPr algn="l">
+              <a:lnSpc>
+                <a:spcPct val="120000"/>
+              </a:lnSpc>
+            </a:pPr>
+            <a:r>
+              <a:rPr sz="1150" b="1">
+                <a:solidFill>
+                  <a:srgbClr val="23201C"/>
+                </a:solidFill>
+                <a:latin typeface="맑은 고딕"/>
+              </a:rPr>
+              <a:t>공모전명·분야</a:t>
+            </a:r>
+          </a:p>
+          <a:p>
+            <a:pPr algn="l">
+              <a:lnSpc>
+                <a:spcPct val="120000"/>
+              </a:lnSpc>
+            </a:pPr>
+            <a:r>
+              <a:rPr sz="1050" b="0">
+                <a:solidFill>
+                  <a:srgbClr val="7A7266"/>
+                </a:solidFill>
+                <a:latin typeface="맑은 고딕"/>
+              </a:rPr>
+              <a:t>수상작명</a:t>
+            </a:r>
+          </a:p>
+        </p:txBody>
+      </p:sp>
+      <p:sp>
+        <p:nvSpPr>
+          <p:cNvPr id="36" name="TextBox 35"/>
+          <p:cNvSpPr txBox="1"/>
+          <p:nvPr/>
+        </p:nvSpPr>
+        <p:spPr>
+          <a:xfrm>
+            <a:off x="640080" y="5943600"/>
+            <a:ext cx="10881360" cy="411480"/>
+          </a:xfrm>
+          <a:prstGeom prst="rect">
+            <a:avLst/>
+          </a:prstGeom>
+          <a:noFill/>
+        </p:spPr>
+        <p:txBody>
+          <a:bodyPr wrap="square" anchor="t">
+            <a:spAutoFit/>
+          </a:bodyPr>
+          <a:lstStyle/>
+          <a:p>
+            <a:pPr algn="l">
+              <a:lnSpc>
+                <a:spcPct val="120000"/>
+              </a:lnSpc>
+            </a:pPr>
+            <a:r>
+              <a:rPr sz="1250" b="0">
+                <a:solidFill>
+                  <a:srgbClr val="7A7266"/>
+                </a:solidFill>
+                <a:latin typeface="맑은 고딕"/>
+              </a:rPr>
+              <a:t>AI Hub 자료는 같은 물체를 여러 장 찍은 데이터라 이미지가 아닌 </a:t>
+            </a:r>
+            <a:r>
+              <a:rPr sz="1250" b="1">
+                <a:solidFill>
+                  <a:srgbClr val="23201C"/>
+                </a:solidFill>
+                <a:latin typeface="맑은 고딕"/>
+              </a:rPr>
+              <a:t>개체 단위로 분할</a:t>
+            </a:r>
+            <a:r>
+              <a:rPr sz="1250" b="0">
+                <a:solidFill>
+                  <a:srgbClr val="7A7266"/>
+                </a:solidFill>
+                <a:latin typeface="맑은 고딕"/>
+              </a:rPr>
+              <a:t>했습니다 — 학습 1,056 · 검증 200개체.</a:t>
+            </a:r>
+          </a:p>
+        </p:txBody>
+      </p:sp>
+      <p:sp>
+        <p:nvSpPr>
+          <p:cNvPr id="37" name="TextBox 36"/>
+          <p:cNvSpPr txBox="1"/>
+          <p:nvPr/>
+        </p:nvSpPr>
+        <p:spPr>
+          <a:xfrm>
+            <a:off x="640080" y="6291072"/>
+            <a:ext cx="10241280" cy="365760"/>
+          </a:xfrm>
+          <a:prstGeom prst="rect">
+            <a:avLst/>
+          </a:prstGeom>
+          <a:noFill/>
+        </p:spPr>
+        <p:txBody>
+          <a:bodyPr wrap="square" anchor="t">
+            <a:spAutoFit/>
+          </a:bodyPr>
+          <a:lstStyle/>
+          <a:p>
+            <a:pPr algn="l">
+              <a:lnSpc>
+                <a:spcPct val="110000"/>
+              </a:lnSpc>
+            </a:pPr>
+            <a:r>
+              <a:rPr sz="1050" b="0">
+                <a:solidFill>
+                  <a:srgbClr val="7A7266"/>
+                </a:solidFill>
+                <a:latin typeface="맑은 고딕"/>
+              </a:rPr>
+              <a:t>전체 명세는 docs/DATA_SOURCES.md — 변수·이용조건·한계를 데이터별로 적었다. 제출물에 실제 농가 사진과 개인정보는 포함되지 않는다.</a:t>
+            </a:r>
+          </a:p>
+        </p:txBody>
+      </p:sp>
+    </p:spTree>
+  </p:cSld>
+  <p:clrMapOvr>
+    <a:masterClrMapping/>
+  </p:clrMapOvr>
+</p:sld>
+</file>
+
+<file path=ppt/slides/slide15.xml><?xml version="1.0" encoding="utf-8"?>
 <p:sld xmlns:a="http://schemas.openxmlformats.org/drawingml/2006/main" xmlns:p="http://schemas.openxmlformats.org/presentationml/2006/main" xmlns:r="http://schemas.openxmlformats.org/officeDocument/2006/relationships">
   <p:cSld>
     <p:bg>

--- a/outputs/ON-FARM_천안_기획서.pptx
+++ b/outputs/ON-FARM_천안_기획서.pptx
@@ -3534,7 +3534,7 @@
                 </a:solidFill>
                 <a:latin typeface="맑은 고딕"/>
               </a:rPr>
-              <a:t>156개</a:t>
+              <a:t>162개</a:t>
             </a:r>
           </a:p>
         </p:txBody>
@@ -10371,7 +10371,7 @@
                 </a:solidFill>
                 <a:latin typeface="맑은 고딕"/>
               </a:rPr>
-              <a:t>156개</a:t>
+              <a:t>162개</a:t>
             </a:r>
           </a:p>
         </p:txBody>

--- a/outputs/ON-FARM_천안_기획서.pptx
+++ b/outputs/ON-FARM_천안_기획서.pptx
@@ -3534,7 +3534,7 @@
                 </a:solidFill>
                 <a:latin typeface="맑은 고딕"/>
               </a:rPr>
-              <a:t>162개</a:t>
+              <a:t>174개</a:t>
             </a:r>
           </a:p>
         </p:txBody>
@@ -10371,7 +10371,7 @@
                 </a:solidFill>
                 <a:latin typeface="맑은 고딕"/>
               </a:rPr>
-              <a:t>162개</a:t>
+              <a:t>174개</a:t>
             </a:r>
           </a:p>
         </p:txBody>

--- a/outputs/ON-FARM_천안_기획서.pptx
+++ b/outputs/ON-FARM_천안_기획서.pptx
@@ -4265,7 +4265,7 @@
                 </a:solidFill>
                 <a:latin typeface="맑은 고딕"/>
               </a:rPr>
-              <a:t>소비자</a:t>
+              <a:t>판매처</a:t>
             </a:r>
           </a:p>
         </p:txBody>
@@ -4304,7 +4304,7 @@
                 </a:solidFill>
                 <a:latin typeface="맑은 고딕"/>
               </a:rPr>
-              <a:t>천안 밖 수요</a:t>
+              <a:t>이미 있는 곳</a:t>
             </a:r>
           </a:p>
         </p:txBody>
@@ -4343,7 +4343,7 @@
                 </a:solidFill>
                 <a:latin typeface="맑은 고딕"/>
               </a:rPr>
-              <a:t>전국에서 주문</a:t>
+              <a:t>직매장·지자체몰·급식</a:t>
             </a:r>
           </a:p>
         </p:txBody>
@@ -4468,7 +4468,7 @@
                 </a:solidFill>
                 <a:latin typeface="맑은 고딕"/>
               </a:rPr>
-              <a:t>직매장 12곳은 경쟁자가 아니라 인프라입니다. ON-FARM 은 직매장에 갈 수 없는 농가와, 직매장이 닿지 않는 지역 밖 수요를 맡습니다.</a:t>
+              <a:t>직매장 12곳은 경쟁자가 아니라 인프라입니다. ON-FARM 은 직매장에 갈 수 없는 농가를 맡습니다.</a:t>
             </a:r>
           </a:p>
           <a:p>
@@ -4478,13 +4478,31 @@
               </a:lnSpc>
             </a:pPr>
             <a:r>
+              <a:rPr sz="1450" b="0">
+                <a:solidFill>
+                  <a:srgbClr val="7A7266"/>
+                </a:solidFill>
+                <a:latin typeface="맑은 고딕"/>
+              </a:rPr>
+              <a:t>수요를 데려온다고 말하지 않습니다. </a:t>
+            </a:r>
+            <a:r>
               <a:rPr sz="1450" b="1">
                 <a:solidFill>
                   <a:srgbClr val="DD4B14"/>
                 </a:solidFill>
                 <a:latin typeface="맑은 고딕"/>
               </a:rPr>
-              <a:t>천안 농산물을 천안 밖으로 파는 구조라, 매출은 천안으로 들어옵니다.</a:t>
+              <a:t>농가의 물건이 '올릴 수 있는 상태'가 되게</a:t>
+            </a:r>
+            <a:r>
+              <a:rPr sz="1450" b="0">
+                <a:solidFill>
+                  <a:srgbClr val="7A7266"/>
+                </a:solidFill>
+                <a:latin typeface="맑은 고딕"/>
+              </a:rPr>
+              <a:t> 할 뿐입니다.</a:t>
             </a:r>
           </a:p>
         </p:txBody>
@@ -4523,7 +4541,7 @@
                 </a:solidFill>
                 <a:latin typeface="맑은 고딕"/>
               </a:rPr>
-              <a:t>거점 화면도 실제 구현이며, 검수 전 상품은 소비자 화면에 노출되지 않는다.</a:t>
+              <a:t>쇼핑몰을 새로 만들지 않는다. 지자체 자사몰이 안 되는 이유는 상품이 없어서가 아니라 소비자가 쿠팡에서 사기 때문이다(현장 청취, docs/FIELD_NOTES.md). 수요가 붙는지는 8주 실증의 판매 성사율로 잰다.</a:t>
             </a:r>
           </a:p>
         </p:txBody>

--- a/outputs/ON-FARM_천안_기획서.pptx
+++ b/outputs/ON-FARM_천안_기획서.pptx
@@ -12006,7 +12006,7 @@
                 </a:solidFill>
                 <a:latin typeface="맑은 고딕"/>
               </a:rPr>
-              <a:t>2,256가구</a:t>
+              <a:t>2,256곳</a:t>
             </a:r>
           </a:p>
         </p:txBody>
@@ -12045,7 +12045,7 @@
                 </a:solidFill>
                 <a:latin typeface="맑은 고딕"/>
               </a:rPr>
-              <a:t>직매장 12곳 · 2026년 매출 271억 원</a:t>
+              <a:t>직매장 12곳 · 매출 271억 원 · 시 보도자료 기준</a:t>
             </a:r>
           </a:p>
         </p:txBody>
@@ -12162,7 +12162,7 @@
                 </a:solidFill>
                 <a:latin typeface="맑은 고딕"/>
               </a:rPr>
-              <a:t>그들은 평균 65.1세가 경영하는 소농이다 (60대 이상 70% · 경지 1ha 미만 77%)</a:t>
+              <a:t>평균 65.1세가 경영하는 소농 (60대 이상 70% · 1ha 미만 77%) — 2020년 값이라 지금은 더 높다</a:t>
             </a:r>
           </a:p>
         </p:txBody>
@@ -12175,8 +12175,8 @@
         </p:nvSpPr>
         <p:spPr>
           <a:xfrm>
-            <a:off x="5943600" y="5440680"/>
-            <a:ext cx="5486400" cy="713232"/>
+            <a:off x="5943600" y="5193792"/>
+            <a:ext cx="5486400" cy="969264"/>
           </a:xfrm>
           <a:prstGeom prst="roundRect">
             <a:avLst>
@@ -12221,8 +12221,8 @@
         </p:nvSpPr>
         <p:spPr>
           <a:xfrm>
-            <a:off x="6172200" y="5559552"/>
-            <a:ext cx="5120640" cy="502920"/>
+            <a:off x="6172200" y="5303520"/>
+            <a:ext cx="5120640" cy="822960"/>
           </a:xfrm>
           <a:prstGeom prst="rect">
             <a:avLst/>
@@ -12247,7 +12247,7 @@
                 </a:solidFill>
                 <a:latin typeface="맑은 고딕"/>
               </a:rPr>
-              <a:t>조사 주체·기준이 달라 정밀한 차집합이 아닙니다. 농가 수는 2024년, 연령·경지 비율은 2020년 총조사입니다.</a:t>
+              <a:t>참여 2,256곳은 시 보도자료, 농가 9,488은 KOSIS 2024 — 조사 주체가 달라 정밀 차집합이 아닙니다. 연령·경지는 2020년 총조사이고 전국은 그 사이 73.3%→78.8% 로 올랐습니다.</a:t>
             </a:r>
           </a:p>
         </p:txBody>

--- a/outputs/ON-FARM_천안_기획서.pptx
+++ b/outputs/ON-FARM_천안_기획서.pptx
@@ -11503,65 +11503,56 @@
               </a:lnSpc>
             </a:pPr>
             <a:r>
-              <a:rPr sz="1700" b="0">
+              <a:rPr sz="1900" b="0">
                 <a:solidFill>
                   <a:srgbClr val="23201C"/>
                 </a:solidFill>
                 <a:latin typeface="맑은 고딕"/>
               </a:rPr>
-              <a:t>밭에서 아무리 잘 길러도 </a:t>
-            </a:r>
-            <a:r>
-              <a:rPr sz="1700" b="1">
+              <a:t>생산성 = 잠재생산량 × 수확률 × </a:t>
+            </a:r>
+            <a:r>
+              <a:rPr sz="1900" b="1">
                 <a:solidFill>
                   <a:srgbClr val="DD4B14"/>
                 </a:solidFill>
                 <a:latin typeface="맑은 고딕"/>
               </a:rPr>
-              <a:t>팔지 못하면 생산성은 0</a:t>
-            </a:r>
-            <a:r>
-              <a:rPr sz="1700" b="0">
+              <a:t>판매전환율</a:t>
+            </a:r>
+          </a:p>
+          <a:p>
+            <a:pPr algn="l">
+              <a:lnSpc>
+                <a:spcPct val="135000"/>
+              </a:lnSpc>
+            </a:pPr>
+            <a:r>
+              <a:rPr sz="1600" b="0">
+                <a:solidFill>
+                  <a:srgbClr val="7A7266"/>
+                </a:solidFill>
+                <a:latin typeface="맑은 고딕"/>
+              </a:rPr>
+              <a:t>ON-FARM 은 </a:t>
+            </a:r>
+            <a:r>
+              <a:rPr sz="1600" b="1">
                 <a:solidFill>
                   <a:srgbClr val="23201C"/>
                 </a:solidFill>
                 <a:latin typeface="맑은 고딕"/>
               </a:rPr>
-              <a:t>입니다.</a:t>
-            </a:r>
-          </a:p>
-          <a:p>
-            <a:pPr algn="l">
-              <a:lnSpc>
-                <a:spcPct val="135000"/>
-              </a:lnSpc>
-            </a:pPr>
-            <a:r>
-              <a:rPr sz="1700" b="0">
+              <a:t>마지막 항 하나만</a:t>
+            </a:r>
+            <a:r>
+              <a:rPr sz="1600" b="0">
                 <a:solidFill>
                   <a:srgbClr val="7A7266"/>
                 </a:solidFill>
                 <a:latin typeface="맑은 고딕"/>
               </a:rPr>
-              <a:t>ON-FARM 은 왼쪽 화살표가 아니라 </a:t>
-            </a:r>
-            <a:r>
-              <a:rPr sz="1700" b="1">
-                <a:solidFill>
-                  <a:srgbClr val="23201C"/>
-                </a:solidFill>
-                <a:latin typeface="맑은 고딕"/>
-              </a:rPr>
-              <a:t>오른쪽 화살표</a:t>
-            </a:r>
-            <a:r>
-              <a:rPr sz="1700" b="0">
-                <a:solidFill>
-                  <a:srgbClr val="7A7266"/>
-                </a:solidFill>
-                <a:latin typeface="맑은 고딕"/>
-              </a:rPr>
-              <a:t>를 굵게 만듭니다 — 이것이 실현 생산성입니다.</a:t>
+              <a:t> 건드립니다 — 앞의 두 항을 다루는 스마트팜 과제와 겹치지 않습니다.</a:t>
             </a:r>
           </a:p>
         </p:txBody>
@@ -11600,7 +11591,7 @@
                 </a:solidFill>
                 <a:latin typeface="맑은 고딕"/>
               </a:rPr>
-              <a:t>과제4 「스마트 농업 &amp; 축산 생산성 향상」의 생산성을 재배 단계가 아니라 실현 단계로 정의한다.</a:t>
+              <a:t>과제4 「스마트 농업 &amp; 축산 생산성 향상」의 생산성을 재배 단계가 아니라 실현 단계로 정의한다. 밭에서 잘 길러도 팔지 못하면 그 해의 생산성은 0이다.</a:t>
             </a:r>
           </a:p>
         </p:txBody>
